--- a/templates/template_en.pptx
+++ b/templates/template_en.pptx
@@ -6082,6 +6082,346 @@
                 <a:extLst>
                   <a:ext uri="{0D108BD9-81ED-4DB2-BD59-A6C34878D82A}">
                     <a16:rowId xmlns:a16="http://schemas.microsoft.com/office/drawing/2014/main" val="10003"/>
+                  </a:ext>
+                </a:extLst>
+              </a:tr>
+              <a:tr h="594259">
+                <a:tc>
+                  <a:txBody>
+                    <a:bodyPr/>
+                    <a:lstStyle/>
+                    <a:p>
+                      <a:endParaRPr lang="zh-CN" altLang="zh-CN" sz="800" kern="1200" dirty="0">
+                        <a:solidFill>
+                          <a:srgbClr val="464B52"/>
+                        </a:solidFill>
+                        <a:effectLst/>
+                        <a:latin typeface="Bai Jamjuree Medium" panose="00000600000000000000" pitchFamily="2" charset="-34"/>
+                        <a:ea typeface="+mn-ea"/>
+                        <a:cs typeface="Bai Jamjuree Medium" panose="00000600000000000000" pitchFamily="2" charset="-34"/>
+                      </a:endParaRPr>
+                    </a:p>
+                  </a:txBody>
+                  <a:tcPr marL="180000" marR="81653" marT="42551" marB="42551" anchor="ctr">
+                    <a:lnL>
+                      <a:noFill/>
+                    </a:lnL>
+                    <a:lnR>
+                      <a:noFill/>
+                    </a:lnR>
+                    <a:lnT w="6350" cap="flat" cmpd="sng" algn="ctr">
+                      <a:solidFill>
+                        <a:schemeClr val="tx1"/>
+                      </a:solidFill>
+                      <a:prstDash val="solid"/>
+                      <a:round/>
+                      <a:headEnd type="none" w="med" len="med"/>
+                      <a:tailEnd type="none" w="med" len="med"/>
+                    </a:lnT>
+                    <a:lnB w="6350" cap="flat" cmpd="sng" algn="ctr">
+                      <a:solidFill>
+                        <a:schemeClr val="tx1"/>
+                      </a:solidFill>
+                      <a:prstDash val="solid"/>
+                      <a:round/>
+                      <a:headEnd type="none" w="med" len="med"/>
+                      <a:tailEnd type="none" w="med" len="med"/>
+                    </a:lnB>
+                    <a:lnTlToBr w="12700" cmpd="sng">
+                      <a:noFill/>
+                      <a:prstDash val="solid"/>
+                    </a:lnTlToBr>
+                    <a:lnBlToTr w="12700" cmpd="sng">
+                      <a:noFill/>
+                      <a:prstDash val="solid"/>
+                    </a:lnBlToTr>
+                  </a:tcPr>
+                </a:tc>
+                <a:tc>
+                  <a:txBody>
+                    <a:bodyPr/>
+                    <a:lstStyle/>
+                    <a:p>
+                      <a:pPr algn="ctr" fontAlgn="b">
+                        <a:buClrTx/>
+                        <a:buSzTx/>
+                        <a:buFontTx/>
+                        <a:buNone/>
+                      </a:pPr>
+                      <a:endParaRPr lang="en-US" sz="800" b="0" kern="1200" dirty="0">
+                        <a:solidFill>
+                          <a:srgbClr val="464B52"/>
+                        </a:solidFill>
+                        <a:latin typeface="Bai Jamjuree Medium" panose="00000600000000000000" pitchFamily="2" charset="-34"/>
+                        <a:ea typeface="+mn-ea"/>
+                        <a:cs typeface="Bai Jamjuree Medium" panose="00000600000000000000" pitchFamily="2" charset="-34"/>
+                      </a:endParaRPr>
+                    </a:p>
+                  </a:txBody>
+                  <a:tcPr marL="81653" marR="81653" marT="42551" marB="42551" anchor="ctr">
+                    <a:lnL>
+                      <a:noFill/>
+                    </a:lnL>
+                    <a:lnR>
+                      <a:noFill/>
+                    </a:lnR>
+                    <a:lnT w="6350" cap="flat" cmpd="sng" algn="ctr">
+                      <a:solidFill>
+                        <a:schemeClr val="tx1"/>
+                      </a:solidFill>
+                      <a:prstDash val="solid"/>
+                      <a:round/>
+                      <a:headEnd type="none" w="med" len="med"/>
+                      <a:tailEnd type="none" w="med" len="med"/>
+                    </a:lnT>
+                    <a:lnB w="6350" cap="flat" cmpd="sng" algn="ctr">
+                      <a:solidFill>
+                        <a:schemeClr val="tx1"/>
+                      </a:solidFill>
+                      <a:prstDash val="solid"/>
+                      <a:round/>
+                      <a:headEnd type="none" w="med" len="med"/>
+                      <a:tailEnd type="none" w="med" len="med"/>
+                    </a:lnB>
+                    <a:lnTlToBr w="12700" cmpd="sng">
+                      <a:noFill/>
+                      <a:prstDash val="solid"/>
+                    </a:lnTlToBr>
+                    <a:lnBlToTr w="12700" cmpd="sng">
+                      <a:noFill/>
+                      <a:prstDash val="solid"/>
+                    </a:lnBlToTr>
+                  </a:tcPr>
+                </a:tc>
+                <a:tc>
+                  <a:txBody>
+                    <a:bodyPr/>
+                    <a:lstStyle/>
+                    <a:p>
+                      <a:pPr algn="ctr" fontAlgn="b">
+                        <a:buClrTx/>
+                        <a:buSzTx/>
+                        <a:buFontTx/>
+                        <a:buNone/>
+                      </a:pPr>
+                      <a:endParaRPr lang="en-US" sz="800" b="0" kern="1200" dirty="0">
+                        <a:solidFill>
+                          <a:srgbClr val="464B52"/>
+                        </a:solidFill>
+                        <a:latin typeface="Bai Jamjuree Medium" panose="00000600000000000000" pitchFamily="2" charset="-34"/>
+                        <a:ea typeface="+mn-ea"/>
+                        <a:cs typeface="Bai Jamjuree Medium" panose="00000600000000000000" pitchFamily="2" charset="-34"/>
+                      </a:endParaRPr>
+                    </a:p>
+                  </a:txBody>
+                  <a:tcPr marL="81653" marR="81653" marT="42551" marB="42551" anchor="ctr">
+                    <a:lnL>
+                      <a:noFill/>
+                    </a:lnL>
+                    <a:lnR>
+                      <a:noFill/>
+                    </a:lnR>
+                    <a:lnT w="6350" cap="flat" cmpd="sng" algn="ctr">
+                      <a:solidFill>
+                        <a:schemeClr val="tx1"/>
+                      </a:solidFill>
+                      <a:prstDash val="solid"/>
+                      <a:round/>
+                      <a:headEnd type="none" w="med" len="med"/>
+                      <a:tailEnd type="none" w="med" len="med"/>
+                    </a:lnT>
+                    <a:lnB w="6350" cap="flat" cmpd="sng" algn="ctr">
+                      <a:solidFill>
+                        <a:schemeClr val="tx1"/>
+                      </a:solidFill>
+                      <a:prstDash val="solid"/>
+                      <a:round/>
+                      <a:headEnd type="none" w="med" len="med"/>
+                      <a:tailEnd type="none" w="med" len="med"/>
+                    </a:lnB>
+                    <a:lnTlToBr w="12700" cmpd="sng">
+                      <a:noFill/>
+                      <a:prstDash val="solid"/>
+                    </a:lnTlToBr>
+                    <a:lnBlToTr w="12700" cmpd="sng">
+                      <a:noFill/>
+                      <a:prstDash val="solid"/>
+                    </a:lnBlToTr>
+                  </a:tcPr>
+                </a:tc>
+                <a:extLst>
+                  <a:ext uri="{0D108BD9-81ED-4DB2-BD59-A6C34878D82A}">
+                    <a16:rowId xmlns:a16="http://schemas.microsoft.com/office/drawing/2014/main" val="10004"/>
+                  </a:ext>
+                </a:extLst>
+              </a:tr>
+              <a:tr h="594259">
+                <a:tc>
+                  <a:txBody>
+                    <a:bodyPr/>
+                    <a:lstStyle/>
+                    <a:p>
+                      <a:endParaRPr lang="zh-CN" altLang="zh-CN" sz="800" kern="1200" dirty="0">
+                        <a:solidFill>
+                          <a:srgbClr val="464B52"/>
+                        </a:solidFill>
+                        <a:effectLst/>
+                        <a:latin typeface="Bai Jamjuree Medium" panose="00000600000000000000" pitchFamily="2" charset="-34"/>
+                        <a:ea typeface="+mn-ea"/>
+                        <a:cs typeface="Bai Jamjuree Medium" panose="00000600000000000000" pitchFamily="2" charset="-34"/>
+                      </a:endParaRPr>
+                    </a:p>
+                  </a:txBody>
+                  <a:tcPr marL="180000" marR="81653" marT="42551" marB="42551" anchor="ctr">
+                    <a:lnL>
+                      <a:noFill/>
+                    </a:lnL>
+                    <a:lnR>
+                      <a:noFill/>
+                    </a:lnR>
+                    <a:lnT w="6350" cap="flat" cmpd="sng" algn="ctr">
+                      <a:solidFill>
+                        <a:schemeClr val="tx1"/>
+                      </a:solidFill>
+                      <a:prstDash val="solid"/>
+                      <a:round/>
+                      <a:headEnd type="none" w="med" len="med"/>
+                      <a:tailEnd type="none" w="med" len="med"/>
+                    </a:lnT>
+                    <a:lnB w="6350" cap="flat" cmpd="sng" algn="ctr">
+                      <a:solidFill>
+                        <a:schemeClr val="tx1"/>
+                      </a:solidFill>
+                      <a:prstDash val="solid"/>
+                      <a:round/>
+                      <a:headEnd type="none" w="med" len="med"/>
+                      <a:tailEnd type="none" w="med" len="med"/>
+                    </a:lnB>
+                    <a:lnTlToBr w="12700" cmpd="sng">
+                      <a:noFill/>
+                      <a:prstDash val="solid"/>
+                    </a:lnTlToBr>
+                    <a:lnBlToTr w="12700" cmpd="sng">
+                      <a:noFill/>
+                      <a:prstDash val="solid"/>
+                    </a:lnBlToTr>
+                  </a:tcPr>
+                </a:tc>
+                <a:tc>
+                  <a:txBody>
+                    <a:bodyPr/>
+                    <a:lstStyle/>
+                    <a:p>
+                      <a:pPr algn="ctr" fontAlgn="b">
+                        <a:buClrTx/>
+                        <a:buSzTx/>
+                        <a:buFontTx/>
+                        <a:buNone/>
+                      </a:pPr>
+                      <a:endParaRPr lang="en-US" sz="800" b="0" kern="1200" dirty="0">
+                        <a:solidFill>
+                          <a:srgbClr val="464B52"/>
+                        </a:solidFill>
+                        <a:latin typeface="Bai Jamjuree Medium" panose="00000600000000000000" pitchFamily="2" charset="-34"/>
+                        <a:ea typeface="+mn-ea"/>
+                        <a:cs typeface="Bai Jamjuree Medium" panose="00000600000000000000" pitchFamily="2" charset="-34"/>
+                      </a:endParaRPr>
+                    </a:p>
+                  </a:txBody>
+                  <a:tcPr marL="81653" marR="81653" marT="42551" marB="42551" anchor="ctr">
+                    <a:lnL>
+                      <a:noFill/>
+                    </a:lnL>
+                    <a:lnR>
+                      <a:noFill/>
+                    </a:lnR>
+                    <a:lnT w="6350" cap="flat" cmpd="sng" algn="ctr">
+                      <a:solidFill>
+                        <a:schemeClr val="tx1"/>
+                      </a:solidFill>
+                      <a:prstDash val="solid"/>
+                      <a:round/>
+                      <a:headEnd type="none" w="med" len="med"/>
+                      <a:tailEnd type="none" w="med" len="med"/>
+                    </a:lnT>
+                    <a:lnB w="6350" cap="flat" cmpd="sng" algn="ctr">
+                      <a:solidFill>
+                        <a:schemeClr val="tx1"/>
+                      </a:solidFill>
+                      <a:prstDash val="solid"/>
+                      <a:round/>
+                      <a:headEnd type="none" w="med" len="med"/>
+                      <a:tailEnd type="none" w="med" len="med"/>
+                    </a:lnB>
+                    <a:lnTlToBr w="12700" cmpd="sng">
+                      <a:noFill/>
+                      <a:prstDash val="solid"/>
+                    </a:lnTlToBr>
+                    <a:lnBlToTr w="12700" cmpd="sng">
+                      <a:noFill/>
+                      <a:prstDash val="solid"/>
+                    </a:lnBlToTr>
+                  </a:tcPr>
+                </a:tc>
+                <a:tc>
+                  <a:txBody>
+                    <a:bodyPr/>
+                    <a:lstStyle/>
+                    <a:p>
+                      <a:pPr algn="ctr" fontAlgn="b">
+                        <a:buClrTx/>
+                        <a:buSzTx/>
+                        <a:buFontTx/>
+                        <a:buNone/>
+                      </a:pPr>
+                      <a:endParaRPr lang="en-US" sz="800" b="0" kern="1200" dirty="0">
+                        <a:solidFill>
+                          <a:srgbClr val="464B52"/>
+                        </a:solidFill>
+                        <a:latin typeface="Bai Jamjuree Medium" panose="00000600000000000000" pitchFamily="2" charset="-34"/>
+                        <a:ea typeface="+mn-ea"/>
+                        <a:cs typeface="Bai Jamjuree Medium" panose="00000600000000000000" pitchFamily="2" charset="-34"/>
+                      </a:endParaRPr>
+                    </a:p>
+                  </a:txBody>
+                  <a:tcPr marL="81653" marR="81653" marT="42551" marB="42551" anchor="ctr">
+                    <a:lnL>
+                      <a:noFill/>
+                    </a:lnL>
+                    <a:lnR>
+                      <a:noFill/>
+                    </a:lnR>
+                    <a:lnT w="6350" cap="flat" cmpd="sng" algn="ctr">
+                      <a:solidFill>
+                        <a:schemeClr val="tx1"/>
+                      </a:solidFill>
+                      <a:prstDash val="solid"/>
+                      <a:round/>
+                      <a:headEnd type="none" w="med" len="med"/>
+                      <a:tailEnd type="none" w="med" len="med"/>
+                    </a:lnT>
+                    <a:lnB w="6350" cap="flat" cmpd="sng" algn="ctr">
+                      <a:solidFill>
+                        <a:schemeClr val="tx1"/>
+                      </a:solidFill>
+                      <a:prstDash val="solid"/>
+                      <a:round/>
+                      <a:headEnd type="none" w="med" len="med"/>
+                      <a:tailEnd type="none" w="med" len="med"/>
+                    </a:lnB>
+                    <a:lnTlToBr w="12700" cmpd="sng">
+                      <a:noFill/>
+                      <a:prstDash val="solid"/>
+                    </a:lnTlToBr>
+                    <a:lnBlToTr w="12700" cmpd="sng">
+                      <a:noFill/>
+                      <a:prstDash val="solid"/>
+                    </a:lnBlToTr>
+                  </a:tcPr>
+                </a:tc>
+                <a:extLst>
+                  <a:ext uri="{0D108BD9-81ED-4DB2-BD59-A6C34878D82A}">
+                    <a16:rowId xmlns:a16="http://schemas.microsoft.com/office/drawing/2014/main" val="10004"/>
                   </a:ext>
                 </a:extLst>
               </a:tr>
